--- a/results/agent_trace/fig_agent_trace.pptx
+++ b/results/agent_trace/fig_agent_trace.pptx
@@ -905,6 +905,365 @@
                     <a:latin typeface="Times New Roman"/>
                   </a:rPr>
                   <a:t>Normalized TPOT</a:t>
+                </a:r>
+              </a:p>
+            </c:rich>
+          </c:tx>
+          <c:layout/>
+          <c:overlay val="0"/>
+        </c:title>
+        <c:numFmt formatCode="General" sourceLinked="0"/>
+        <c:majorTickMark val="out"/>
+        <c:minorTickMark val="none"/>
+        <c:tickLblPos val="nextTo"/>
+        <c:spPr>
+          <a:ln w="12700" cap="flat">
+            <a:solidFill>
+              <a:srgbClr val="888888"/>
+            </a:solidFill>
+            <a:prstDash val="solid"/>
+            <a:round/>
+          </a:ln>
+        </c:spPr>
+        <c:txPr>
+          <a:bodyPr/>
+          <a:lstStyle/>
+          <a:p>
+            <a:pPr>
+              <a:defRPr sz="1000" b="0" i="0" u="none" strike="noStrike">
+                <a:solidFill>
+                  <a:srgbClr val="595959"/>
+                </a:solidFill>
+                <a:latin typeface="Times New Roman"/>
+              </a:defRPr>
+            </a:pPr>
+            <a:endParaRPr lang="en-US"/>
+          </a:p>
+        </c:txPr>
+        <c:crossAx val="2094734554"/>
+        <c:crosses val="autoZero"/>
+        <c:crossBetween val="between"/>
+      </c:valAx>
+      <c:spPr>
+        <a:noFill/>
+        <a:ln>
+          <a:noFill/>
+        </a:ln>
+        <a:effectLst/>
+      </c:spPr>
+    </c:plotArea>
+    <c:plotVisOnly val="1"/>
+    <c:dispBlanksAs val="span"/>
+  </c:chart>
+  <c:spPr>
+    <a:noFill/>
+    <a:ln>
+      <a:noFill/>
+    </a:ln>
+    <a:effectLst/>
+  </c:spPr>
+  <c:externalData r:id="rId1">
+    <c:autoUpdate val="0"/>
+  </c:externalData>
+</c:chartSpace>
+</file>
+
+<file path=ppt/charts/chart3.xml><?xml version="1.0" encoding="utf-8"?>
+<c:chartSpace xmlns:c="http://schemas.openxmlformats.org/drawingml/2006/chart" xmlns:a="http://schemas.openxmlformats.org/drawingml/2006/main" xmlns:r="http://schemas.openxmlformats.org/officeDocument/2006/relationships">
+  <c:date1904 val="0"/>
+  <c:roundedCorners val="1"/>
+  <c:chart>
+    <c:title>
+      <c:tx>
+        <c:rich>
+          <a:bodyPr/>
+          <a:lstStyle/>
+          <a:p>
+            <a:pPr>
+              <a:defRPr sz="1300" b="0" i="0" u="none" strike="noStrike">
+                <a:solidFill>
+                  <a:srgbClr val="1A1A1A"/>
+                </a:solidFill>
+                <a:latin typeface="Times New Roman"/>
+              </a:defRPr>
+            </a:pPr>
+            <a:r>
+              <a:rPr sz="1300" b="0" i="0" u="none" strike="noStrike">
+                <a:solidFill>
+                  <a:srgbClr val="1A1A1A"/>
+                </a:solidFill>
+                <a:latin typeface="Times New Roman"/>
+              </a:rPr>
+              <a:t>(c)  Server-side prefix reuse</a:t>
+            </a:r>
+          </a:p>
+        </c:rich>
+      </c:tx>
+      <c:layout/>
+      <c:overlay val="0"/>
+    </c:title>
+    <c:autoTitleDeleted val="0"/>
+    <c:plotArea>
+      <c:layout/>
+      <c:barChart>
+        <c:barDir val="col"/>
+        <c:grouping val="clustered"/>
+        <c:varyColors val="0"/>
+        <c:ser>
+          <c:idx val="0"/>
+          <c:order val="0"/>
+          <c:tx>
+            <c:strRef>
+              <c:f>Sheet1!$B$1</c:f>
+              <c:strCache>
+                <c:ptCount val="1"/>
+                <c:pt idx="0">
+                  <c:v>SGLang</c:v>
+                </c:pt>
+              </c:strCache>
+            </c:strRef>
+          </c:tx>
+          <c:spPr>
+            <a:solidFill>
+              <a:srgbClr val="0072B2"/>
+            </a:solidFill>
+            <a:effectLst/>
+          </c:spPr>
+          <c:invertIfNegative val="0"/>
+          <c:dLbls>
+            <c:numFmt formatCode="#,##0" sourceLinked="0"/>
+            <c:txPr>
+              <a:bodyPr/>
+              <a:lstStyle/>
+              <a:p>
+                <a:pPr>
+                  <a:defRPr b="0" i="0" strike="noStrike" sz="1200" u="none">
+                    <a:solidFill>
+                      <a:srgbClr val="000000"/>
+                    </a:solidFill>
+                    <a:latin typeface="Arial"/>
+                  </a:defRPr>
+                </a:pPr>
+              </a:p>
+            </c:txPr>
+            <c:showLegendKey val="0"/>
+            <c:showVal val="0"/>
+            <c:showCatName val="0"/>
+            <c:showSerName val="0"/>
+            <c:showPercent val="0"/>
+            <c:showBubbleSize val="0"/>
+            <c:showLeaderLines val="0"/>
+          </c:dLbls>
+          <c:cat>
+            <c:multiLvlStrRef>
+              <c:f>Sheet1!$A$2:$A$2</c:f>
+              <c:multiLvlStrCache>
+                <c:ptCount val="1"/>
+                <c:lvl>
+                  <c:pt idx="0">
+                    <c:v>C=4</c:v>
+                  </c:pt>
+                </c:lvl>
+              </c:multiLvlStrCache>
+            </c:multiLvlStrRef>
+          </c:cat>
+          <c:val>
+            <c:numRef>
+              <c:f>Sheet1!$B$2:$B$2</c:f>
+              <c:numCache>
+                <c:formatCode>General</c:formatCode>
+                <c:ptCount val="1"/>
+                <c:pt idx="0">
+                  <c:v>42.76</c:v>
+                </c:pt>
+              </c:numCache>
+            </c:numRef>
+          </c:val>
+        </c:ser>
+        <c:ser>
+          <c:idx val="1"/>
+          <c:order val="1"/>
+          <c:tx>
+            <c:strRef>
+              <c:f>Sheet1!$C$1</c:f>
+              <c:strCache>
+                <c:ptCount val="1"/>
+                <c:pt idx="0">
+                  <c:v>Ours</c:v>
+                </c:pt>
+              </c:strCache>
+            </c:strRef>
+          </c:tx>
+          <c:spPr>
+            <a:solidFill>
+              <a:srgbClr val="009E73"/>
+            </a:solidFill>
+            <a:effectLst/>
+          </c:spPr>
+          <c:invertIfNegative val="0"/>
+          <c:dLbls>
+            <c:numFmt formatCode="#,##0" sourceLinked="0"/>
+            <c:txPr>
+              <a:bodyPr/>
+              <a:lstStyle/>
+              <a:p>
+                <a:pPr>
+                  <a:defRPr b="0" i="0" strike="noStrike" sz="1200" u="none">
+                    <a:solidFill>
+                      <a:srgbClr val="000000"/>
+                    </a:solidFill>
+                    <a:latin typeface="Arial"/>
+                  </a:defRPr>
+                </a:pPr>
+              </a:p>
+            </c:txPr>
+            <c:showLegendKey val="0"/>
+            <c:showVal val="0"/>
+            <c:showCatName val="0"/>
+            <c:showSerName val="0"/>
+            <c:showPercent val="0"/>
+            <c:showBubbleSize val="0"/>
+            <c:showLeaderLines val="0"/>
+          </c:dLbls>
+          <c:cat>
+            <c:multiLvlStrRef>
+              <c:f>Sheet1!$A$2:$A$2</c:f>
+              <c:multiLvlStrCache>
+                <c:ptCount val="1"/>
+                <c:lvl>
+                  <c:pt idx="0">
+                    <c:v>C=4</c:v>
+                  </c:pt>
+                </c:lvl>
+              </c:multiLvlStrCache>
+            </c:multiLvlStrRef>
+          </c:cat>
+          <c:val>
+            <c:numRef>
+              <c:f>Sheet1!$C$2:$C$2</c:f>
+              <c:numCache>
+                <c:formatCode>General</c:formatCode>
+                <c:ptCount val="1"/>
+                <c:pt idx="0">
+                  <c:v>53.69</c:v>
+                </c:pt>
+              </c:numCache>
+            </c:numRef>
+          </c:val>
+        </c:ser>
+        <c:dLbls>
+          <c:numFmt formatCode="#,##0" sourceLinked="0"/>
+          <c:txPr>
+            <a:bodyPr/>
+            <a:lstStyle/>
+            <a:p>
+              <a:pPr>
+                <a:defRPr b="0" i="0" strike="noStrike" sz="1200" u="none">
+                  <a:solidFill>
+                    <a:srgbClr val="000000"/>
+                  </a:solidFill>
+                  <a:latin typeface="Arial"/>
+                </a:defRPr>
+              </a:pPr>
+            </a:p>
+          </c:txPr>
+          <c:showLegendKey val="0"/>
+          <c:showVal val="0"/>
+          <c:showCatName val="0"/>
+          <c:showSerName val="0"/>
+          <c:showPercent val="0"/>
+          <c:showBubbleSize val="0"/>
+          <c:showLeaderLines val="0"/>
+        </c:dLbls>
+        <c:gapWidth val="150"/>
+        <c:overlap val="0"/>
+        <c:axId val="2094734554"/>
+        <c:axId val="2094734552"/>
+        <c:axId val="2094734556"/>
+      </c:barChart>
+      <c:catAx>
+        <c:axId val="2094734554"/>
+        <c:scaling>
+          <c:orientation val="minMax"/>
+        </c:scaling>
+        <c:delete val="0"/>
+        <c:axPos val="b"/>
+        <c:numFmt formatCode="General" sourceLinked="1"/>
+        <c:majorTickMark val="out"/>
+        <c:minorTickMark val="none"/>
+        <c:tickLblPos val="low"/>
+        <c:spPr>
+          <a:ln w="12700" cap="flat">
+            <a:solidFill>
+              <a:srgbClr val="888888"/>
+            </a:solidFill>
+            <a:prstDash val="solid"/>
+            <a:round/>
+          </a:ln>
+        </c:spPr>
+        <c:txPr>
+          <a:bodyPr/>
+          <a:lstStyle/>
+          <a:p>
+            <a:pPr>
+              <a:defRPr sz="1100" b="0" i="0" u="none" strike="noStrike">
+                <a:solidFill>
+                  <a:srgbClr val="595959"/>
+                </a:solidFill>
+                <a:latin typeface="Times New Roman"/>
+              </a:defRPr>
+            </a:pPr>
+            <a:endParaRPr lang="en-US"/>
+          </a:p>
+        </c:txPr>
+        <c:crossAx val="2094734552"/>
+        <c:crosses val="autoZero"/>
+        <c:auto val="1"/>
+        <c:lblAlgn val="ctr"/>
+        <c:noMultiLvlLbl val="1"/>
+      </c:catAx>
+      <c:valAx>
+        <c:axId val="2094734552"/>
+        <c:scaling>
+          <c:orientation val="minMax"/>
+          <c:max val="100"/>
+          <c:min val="0"/>
+        </c:scaling>
+        <c:delete val="0"/>
+        <c:axPos val="l"/>
+        <c:majorGridlines>
+          <c:spPr>
+            <a:ln w="9525" cap="flat">
+              <a:solidFill>
+                <a:srgbClr val="D9D9D9"/>
+              </a:solidFill>
+              <a:prstDash val="solid"/>
+              <a:round/>
+            </a:ln>
+          </c:spPr>
+        </c:majorGridlines>
+        <c:title>
+          <c:tx>
+            <c:rich>
+              <a:bodyPr/>
+              <a:lstStyle/>
+              <a:p>
+                <a:pPr>
+                  <a:defRPr sz="1100" b="0" i="0" u="none" strike="noStrike">
+                    <a:solidFill>
+                      <a:srgbClr val="000000"/>
+                    </a:solidFill>
+                    <a:latin typeface="Times New Roman"/>
+                  </a:defRPr>
+                </a:pPr>
+                <a:r>
+                  <a:rPr sz="1100" b="0" i="0" u="none" strike="noStrike">
+                    <a:solidFill>
+                      <a:srgbClr val="000000"/>
+                    </a:solidFill>
+                    <a:latin typeface="Times New Roman"/>
+                  </a:rPr>
+                  <a:t>Cache Hit Rate (%)</a:t>
                 </a:r>
               </a:p>
             </c:rich>
@@ -1907,8 +2266,8 @@
           <p:nvPr/>
         </p:nvGraphicFramePr>
         <p:xfrm>
-          <a:off x="1737360" y="1234440"/>
-          <a:ext cx="4206240" cy="3931920"/>
+          <a:off x="457200" y="1234440"/>
+          <a:ext cx="3657600" cy="3931920"/>
         </p:xfrm>
         <a:graphic xmlns:a="http://schemas.openxmlformats.org/drawingml/2006/main">
           <a:graphicData uri="http://schemas.openxmlformats.org/drawingml/2006/chart">
@@ -1923,8 +2282,8 @@
           <p:nvPr/>
         </p:nvGraphicFramePr>
         <p:xfrm>
-          <a:off x="6400800" y="1234440"/>
-          <a:ext cx="4206240" cy="3931920"/>
+          <a:off x="4343400" y="1234440"/>
+          <a:ext cx="3657600" cy="3931920"/>
         </p:xfrm>
         <a:graphic xmlns:a="http://schemas.openxmlformats.org/drawingml/2006/main">
           <a:graphicData uri="http://schemas.openxmlformats.org/drawingml/2006/chart">
@@ -1932,9 +2291,25 @@
           </a:graphicData>
         </a:graphic>
       </p:graphicFrame>
+      <p:graphicFrame>
+        <p:nvGraphicFramePr>
+          <p:cNvPr id="6" name="Chart 2" descr=""/>
+          <p:cNvGraphicFramePr/>
+          <p:nvPr/>
+        </p:nvGraphicFramePr>
+        <p:xfrm>
+          <a:off x="8229600" y="1234440"/>
+          <a:ext cx="3657600" cy="3931920"/>
+        </p:xfrm>
+        <a:graphic xmlns:a="http://schemas.openxmlformats.org/drawingml/2006/main">
+          <a:graphicData uri="http://schemas.openxmlformats.org/drawingml/2006/chart">
+            <c:chart xmlns:c="http://schemas.openxmlformats.org/drawingml/2006/chart" r:id="rId3"/>
+          </a:graphicData>
+        </a:graphic>
+      </p:graphicFrame>
       <p:sp>
         <p:nvSpPr>
-          <p:cNvPr id="6" name="Shape 2"/>
+          <p:cNvPr id="7" name="Shape 2"/>
           <p:cNvSpPr/>
           <p:nvPr/>
         </p:nvSpPr>
@@ -1959,7 +2334,7 @@
       </p:sp>
       <p:sp>
         <p:nvSpPr>
-          <p:cNvPr id="7" name="Text 3"/>
+          <p:cNvPr id="8" name="Text 3"/>
           <p:cNvSpPr/>
           <p:nvPr/>
         </p:nvSpPr>
@@ -1998,7 +2373,7 @@
       </p:sp>
       <p:sp>
         <p:nvSpPr>
-          <p:cNvPr id="8" name="Shape 4"/>
+          <p:cNvPr id="9" name="Shape 4"/>
           <p:cNvSpPr/>
           <p:nvPr/>
         </p:nvSpPr>
@@ -2023,7 +2398,7 @@
       </p:sp>
       <p:sp>
         <p:nvSpPr>
-          <p:cNvPr id="9" name="Text 5"/>
+          <p:cNvPr id="10" name="Text 5"/>
           <p:cNvSpPr/>
           <p:nvPr/>
         </p:nvSpPr>
@@ -2062,7 +2437,7 @@
       </p:sp>
       <p:sp>
         <p:nvSpPr>
-          <p:cNvPr id="10" name="Shape 6"/>
+          <p:cNvPr id="11" name="Shape 6"/>
           <p:cNvSpPr/>
           <p:nvPr/>
         </p:nvSpPr>
@@ -2087,7 +2462,7 @@
       </p:sp>
       <p:sp>
         <p:nvSpPr>
-          <p:cNvPr id="11" name="Text 7"/>
+          <p:cNvPr id="12" name="Text 7"/>
           <p:cNvSpPr/>
           <p:nvPr/>
         </p:nvSpPr>
@@ -2126,7 +2501,7 @@
       </p:sp>
       <p:sp>
         <p:nvSpPr>
-          <p:cNvPr id="12" name="Text 8"/>
+          <p:cNvPr id="13" name="Text 8"/>
           <p:cNvSpPr/>
           <p:nvPr/>
         </p:nvSpPr>
